--- a/Lectures/Lecture1.pptx
+++ b/Lectures/Lecture1.pptx
@@ -365,7 +365,7 @@
           <a:p>
             <a:fld id="{CBA08D16-15DC-4E25-BDC3-F25146157B16}" type="datetimeFigureOut">
               <a:rPr lang="ru-RU" smtClean="0"/>
-              <a:t>11.09.2025</a:t>
+              <a:t>02.09.2026</a:t>
             </a:fld>
             <a:endParaRPr lang="ru-RU"/>
           </a:p>
@@ -941,7 +941,7 @@
           <a:p>
             <a:fld id="{FCEC8293-DB51-454A-BE81-EC8FCB31EBA2}" type="datetime1">
               <a:rPr lang="ru-RU" smtClean="0"/>
-              <a:t>11.09.2025</a:t>
+              <a:t>02.09.2026</a:t>
             </a:fld>
             <a:endParaRPr lang="ru-RU"/>
           </a:p>
@@ -1112,7 +1112,7 @@
           <a:p>
             <a:fld id="{241C87B1-1C35-4DBD-BC18-2BC72E776603}" type="datetime1">
               <a:rPr lang="ru-RU" smtClean="0"/>
-              <a:t>11.09.2025</a:t>
+              <a:t>02.09.2026</a:t>
             </a:fld>
             <a:endParaRPr lang="ru-RU"/>
           </a:p>
@@ -1293,7 +1293,7 @@
           <a:p>
             <a:fld id="{3134C275-26C0-42CD-9111-9ADE65922AF9}" type="datetime1">
               <a:rPr lang="ru-RU" smtClean="0"/>
-              <a:t>11.09.2025</a:t>
+              <a:t>02.09.2026</a:t>
             </a:fld>
             <a:endParaRPr lang="ru-RU"/>
           </a:p>
@@ -1464,7 +1464,7 @@
           <a:p>
             <a:fld id="{C1A9A50B-C350-45F5-8AAB-ADB9E670AF2E}" type="datetime1">
               <a:rPr lang="ru-RU" smtClean="0"/>
-              <a:t>11.09.2025</a:t>
+              <a:t>02.09.2026</a:t>
             </a:fld>
             <a:endParaRPr lang="ru-RU"/>
           </a:p>
@@ -1712,7 +1712,7 @@
           <a:p>
             <a:fld id="{089688C9-348F-42F9-B6C0-5990DDE0C5B2}" type="datetime1">
               <a:rPr lang="ru-RU" smtClean="0"/>
-              <a:t>11.09.2025</a:t>
+              <a:t>02.09.2026</a:t>
             </a:fld>
             <a:endParaRPr lang="ru-RU"/>
           </a:p>
@@ -1944,7 +1944,7 @@
           <a:p>
             <a:fld id="{684AFD8F-6DD9-4AD3-A505-FDC3F5C5F3F6}" type="datetime1">
               <a:rPr lang="ru-RU" smtClean="0"/>
-              <a:t>11.09.2025</a:t>
+              <a:t>02.09.2026</a:t>
             </a:fld>
             <a:endParaRPr lang="ru-RU"/>
           </a:p>
@@ -2311,7 +2311,7 @@
           <a:p>
             <a:fld id="{63551EFE-4D02-45EB-A747-8B6F047B5AA0}" type="datetime1">
               <a:rPr lang="ru-RU" smtClean="0"/>
-              <a:t>11.09.2025</a:t>
+              <a:t>02.09.2026</a:t>
             </a:fld>
             <a:endParaRPr lang="ru-RU"/>
           </a:p>
@@ -2431,7 +2431,7 @@
           <a:p>
             <a:fld id="{813A9F34-E5CD-4B8F-AA9E-889C84372B20}" type="datetime1">
               <a:rPr lang="ru-RU" smtClean="0"/>
-              <a:t>11.09.2025</a:t>
+              <a:t>02.09.2026</a:t>
             </a:fld>
             <a:endParaRPr lang="ru-RU"/>
           </a:p>
@@ -2529,7 +2529,7 @@
           <a:p>
             <a:fld id="{51224D22-9B29-44A6-8E82-95FC492DEDC1}" type="datetime1">
               <a:rPr lang="ru-RU" smtClean="0"/>
-              <a:t>11.09.2025</a:t>
+              <a:t>02.09.2026</a:t>
             </a:fld>
             <a:endParaRPr lang="ru-RU"/>
           </a:p>
@@ -2807,7 +2807,7 @@
           <a:p>
             <a:fld id="{91D1034F-4441-48A1-BDC0-25EA1022324A}" type="datetime1">
               <a:rPr lang="ru-RU" smtClean="0"/>
-              <a:t>11.09.2025</a:t>
+              <a:t>02.09.2026</a:t>
             </a:fld>
             <a:endParaRPr lang="ru-RU"/>
           </a:p>
@@ -3062,7 +3062,7 @@
           <a:p>
             <a:fld id="{B0FFDE79-B627-473B-AE17-4C65BD2495F7}" type="datetime1">
               <a:rPr lang="ru-RU" smtClean="0"/>
-              <a:t>11.09.2025</a:t>
+              <a:t>02.09.2026</a:t>
             </a:fld>
             <a:endParaRPr lang="ru-RU"/>
           </a:p>
@@ -3276,7 +3276,7 @@
           <a:p>
             <a:fld id="{11CA537A-1B8C-47BA-9BA6-7CE3FAFDA8BE}" type="datetime1">
               <a:rPr lang="ru-RU" smtClean="0"/>
-              <a:t>11.09.2025</a:t>
+              <a:t>02.09.2026</a:t>
             </a:fld>
             <a:endParaRPr lang="ru-RU"/>
           </a:p>
@@ -3722,10 +3722,6 @@
               <a:rPr lang="ru-RU" dirty="0"/>
               <a:t>Симметричные криптосистемы</a:t>
             </a:r>
-            <a:r>
-              <a:rPr lang="en-US" dirty="0"/>
-              <a:t/>
-            </a:r>
             <a:br>
               <a:rPr lang="en-US" dirty="0"/>
             </a:br>
@@ -3776,7 +3772,7 @@
           <a:p>
             <a:r>
               <a:rPr lang="ru-RU" dirty="0"/>
-              <a:t>МИФИ 2025</a:t>
+              <a:t>МИФИ 2026</a:t>
             </a:r>
           </a:p>
         </p:txBody>
@@ -3939,7 +3935,7 @@
           <p:cNvPr id="2" name="Заголовок 1">
             <a:extLst>
               <a:ext uri="{FF2B5EF4-FFF2-40B4-BE49-F238E27FC236}">
-                <a16:creationId xmlns:a16="http://schemas.microsoft.com/office/drawing/2014/main" xmlns="" id="{A8BA30DC-6378-4E66-ADCA-33358194A921}"/>
+                <a16:creationId xmlns:a16="http://schemas.microsoft.com/office/drawing/2014/main" id="{A8BA30DC-6378-4E66-ADCA-33358194A921}"/>
               </a:ext>
             </a:extLst>
           </p:cNvPr>
@@ -3972,7 +3968,7 @@
           <p:cNvPr id="3" name="Объект 2">
             <a:extLst>
               <a:ext uri="{FF2B5EF4-FFF2-40B4-BE49-F238E27FC236}">
-                <a16:creationId xmlns:a16="http://schemas.microsoft.com/office/drawing/2014/main" xmlns="" id="{746B2EB9-6C06-4959-ABE9-0321FF648651}"/>
+                <a16:creationId xmlns:a16="http://schemas.microsoft.com/office/drawing/2014/main" id="{746B2EB9-6C06-4959-ABE9-0321FF648651}"/>
               </a:ext>
             </a:extLst>
           </p:cNvPr>
@@ -4056,7 +4052,7 @@
           <p:cNvPr id="4" name="Номер слайда 3">
             <a:extLst>
               <a:ext uri="{FF2B5EF4-FFF2-40B4-BE49-F238E27FC236}">
-                <a16:creationId xmlns:a16="http://schemas.microsoft.com/office/drawing/2014/main" xmlns="" id="{7E3CB3D5-4FCA-45F5-A504-60DE52A265A8}"/>
+                <a16:creationId xmlns:a16="http://schemas.microsoft.com/office/drawing/2014/main" id="{7E3CB3D5-4FCA-45F5-A504-60DE52A265A8}"/>
               </a:ext>
             </a:extLst>
           </p:cNvPr>
@@ -5812,7 +5808,7 @@
           <p:cNvPr id="2" name="Заголовок 1">
             <a:extLst>
               <a:ext uri="{FF2B5EF4-FFF2-40B4-BE49-F238E27FC236}">
-                <a16:creationId xmlns:a16="http://schemas.microsoft.com/office/drawing/2014/main" xmlns="" id="{E8F26C5E-8854-4F6C-BF2F-F94A72158740}"/>
+                <a16:creationId xmlns:a16="http://schemas.microsoft.com/office/drawing/2014/main" id="{E8F26C5E-8854-4F6C-BF2F-F94A72158740}"/>
               </a:ext>
             </a:extLst>
           </p:cNvPr>
@@ -5840,7 +5836,7 @@
           <p:cNvPr id="3" name="Объект 2">
             <a:extLst>
               <a:ext uri="{FF2B5EF4-FFF2-40B4-BE49-F238E27FC236}">
-                <a16:creationId xmlns:a16="http://schemas.microsoft.com/office/drawing/2014/main" xmlns="" id="{81D53E11-D0D0-4BA7-A8FC-AD3B3F6DEFD1}"/>
+                <a16:creationId xmlns:a16="http://schemas.microsoft.com/office/drawing/2014/main" id="{81D53E11-D0D0-4BA7-A8FC-AD3B3F6DEFD1}"/>
               </a:ext>
             </a:extLst>
           </p:cNvPr>
@@ -5933,7 +5929,7 @@
           <p:cNvPr id="4" name="Номер слайда 3">
             <a:extLst>
               <a:ext uri="{FF2B5EF4-FFF2-40B4-BE49-F238E27FC236}">
-                <a16:creationId xmlns:a16="http://schemas.microsoft.com/office/drawing/2014/main" xmlns="" id="{87B38D73-BE13-43C9-96E6-75686194F7E2}"/>
+                <a16:creationId xmlns:a16="http://schemas.microsoft.com/office/drawing/2014/main" id="{87B38D73-BE13-43C9-96E6-75686194F7E2}"/>
               </a:ext>
             </a:extLst>
           </p:cNvPr>
@@ -5992,7 +5988,7 @@
           <p:cNvPr id="2" name="Заголовок 1">
             <a:extLst>
               <a:ext uri="{FF2B5EF4-FFF2-40B4-BE49-F238E27FC236}">
-                <a16:creationId xmlns:a16="http://schemas.microsoft.com/office/drawing/2014/main" xmlns="" id="{90DAE248-EB2B-4755-9CE0-D7DE069642E7}"/>
+                <a16:creationId xmlns:a16="http://schemas.microsoft.com/office/drawing/2014/main" id="{90DAE248-EB2B-4755-9CE0-D7DE069642E7}"/>
               </a:ext>
             </a:extLst>
           </p:cNvPr>
@@ -6020,7 +6016,7 @@
           <p:cNvPr id="4" name="Номер слайда 3">
             <a:extLst>
               <a:ext uri="{FF2B5EF4-FFF2-40B4-BE49-F238E27FC236}">
-                <a16:creationId xmlns:a16="http://schemas.microsoft.com/office/drawing/2014/main" xmlns="" id="{5C9A34F6-4F1D-4746-98FC-B8A48B858297}"/>
+                <a16:creationId xmlns:a16="http://schemas.microsoft.com/office/drawing/2014/main" id="{5C9A34F6-4F1D-4746-98FC-B8A48B858297}"/>
               </a:ext>
             </a:extLst>
           </p:cNvPr>
@@ -6049,7 +6045,7 @@
           <p:cNvPr id="8" name="Прямоугольник 7">
             <a:extLst>
               <a:ext uri="{FF2B5EF4-FFF2-40B4-BE49-F238E27FC236}">
-                <a16:creationId xmlns:a16="http://schemas.microsoft.com/office/drawing/2014/main" xmlns="" id="{C5C6D00E-0C13-41E4-B7F4-D5B9E8B96A75}"/>
+                <a16:creationId xmlns:a16="http://schemas.microsoft.com/office/drawing/2014/main" id="{C5C6D00E-0C13-41E4-B7F4-D5B9E8B96A75}"/>
               </a:ext>
             </a:extLst>
           </p:cNvPr>
@@ -6098,7 +6094,7 @@
           <p:cNvPr id="9" name="Прямоугольник 8">
             <a:extLst>
               <a:ext uri="{FF2B5EF4-FFF2-40B4-BE49-F238E27FC236}">
-                <a16:creationId xmlns:a16="http://schemas.microsoft.com/office/drawing/2014/main" xmlns="" id="{AABA0C71-95BC-4792-AF69-282F4C3AE222}"/>
+                <a16:creationId xmlns:a16="http://schemas.microsoft.com/office/drawing/2014/main" id="{AABA0C71-95BC-4792-AF69-282F4C3AE222}"/>
               </a:ext>
             </a:extLst>
           </p:cNvPr>
@@ -6147,7 +6143,7 @@
           <p:cNvPr id="11" name="Рисунок 10">
             <a:extLst>
               <a:ext uri="{FF2B5EF4-FFF2-40B4-BE49-F238E27FC236}">
-                <a16:creationId xmlns:a16="http://schemas.microsoft.com/office/drawing/2014/main" xmlns="" id="{0A664895-8511-475A-997E-2D74F7B497D5}"/>
+                <a16:creationId xmlns:a16="http://schemas.microsoft.com/office/drawing/2014/main" id="{0A664895-8511-475A-997E-2D74F7B497D5}"/>
               </a:ext>
             </a:extLst>
           </p:cNvPr>
@@ -6183,7 +6179,7 @@
           <p:cNvPr id="12" name="Прямоугольник 11">
             <a:extLst>
               <a:ext uri="{FF2B5EF4-FFF2-40B4-BE49-F238E27FC236}">
-                <a16:creationId xmlns:a16="http://schemas.microsoft.com/office/drawing/2014/main" xmlns="" id="{782B7E91-B4E0-4A47-9EDC-A8C5C2D35E90}"/>
+                <a16:creationId xmlns:a16="http://schemas.microsoft.com/office/drawing/2014/main" id="{782B7E91-B4E0-4A47-9EDC-A8C5C2D35E90}"/>
               </a:ext>
             </a:extLst>
           </p:cNvPr>
@@ -6232,7 +6228,7 @@
           <p:cNvPr id="14" name="Прямая со стрелкой 13">
             <a:extLst>
               <a:ext uri="{FF2B5EF4-FFF2-40B4-BE49-F238E27FC236}">
-                <a16:creationId xmlns:a16="http://schemas.microsoft.com/office/drawing/2014/main" xmlns="" id="{494AE664-36D8-43A5-A2F3-EE57FD834D74}"/>
+                <a16:creationId xmlns:a16="http://schemas.microsoft.com/office/drawing/2014/main" id="{494AE664-36D8-43A5-A2F3-EE57FD834D74}"/>
               </a:ext>
             </a:extLst>
           </p:cNvPr>
@@ -6275,7 +6271,7 @@
           <p:cNvPr id="17" name="Прямая со стрелкой 16">
             <a:extLst>
               <a:ext uri="{FF2B5EF4-FFF2-40B4-BE49-F238E27FC236}">
-                <a16:creationId xmlns:a16="http://schemas.microsoft.com/office/drawing/2014/main" xmlns="" id="{40528B61-805F-44BD-87D2-473C9288BE3A}"/>
+                <a16:creationId xmlns:a16="http://schemas.microsoft.com/office/drawing/2014/main" id="{40528B61-805F-44BD-87D2-473C9288BE3A}"/>
               </a:ext>
             </a:extLst>
           </p:cNvPr>
@@ -6318,7 +6314,7 @@
           <p:cNvPr id="21" name="Прямая со стрелкой 20">
             <a:extLst>
               <a:ext uri="{FF2B5EF4-FFF2-40B4-BE49-F238E27FC236}">
-                <a16:creationId xmlns:a16="http://schemas.microsoft.com/office/drawing/2014/main" xmlns="" id="{FCE5B01E-851E-42F5-8287-5ADFB3870352}"/>
+                <a16:creationId xmlns:a16="http://schemas.microsoft.com/office/drawing/2014/main" id="{FCE5B01E-851E-42F5-8287-5ADFB3870352}"/>
               </a:ext>
             </a:extLst>
           </p:cNvPr>
@@ -6361,7 +6357,7 @@
           <p:cNvPr id="26" name="Объект 2">
             <a:extLst>
               <a:ext uri="{FF2B5EF4-FFF2-40B4-BE49-F238E27FC236}">
-                <a16:creationId xmlns:a16="http://schemas.microsoft.com/office/drawing/2014/main" xmlns="" id="{B32C4AF2-B1AA-48F2-9D3D-6012156992B6}"/>
+                <a16:creationId xmlns:a16="http://schemas.microsoft.com/office/drawing/2014/main" id="{B32C4AF2-B1AA-48F2-9D3D-6012156992B6}"/>
               </a:ext>
             </a:extLst>
           </p:cNvPr>
@@ -6792,7 +6788,7 @@
           <p:cNvPr id="10" name="TextBox 9">
             <a:extLst>
               <a:ext uri="{FF2B5EF4-FFF2-40B4-BE49-F238E27FC236}">
-                <a16:creationId xmlns:a16="http://schemas.microsoft.com/office/drawing/2014/main" xmlns="" id="{B8527A0B-BF8D-439D-9CC4-0C5E6B14DACD}"/>
+                <a16:creationId xmlns:a16="http://schemas.microsoft.com/office/drawing/2014/main" id="{B8527A0B-BF8D-439D-9CC4-0C5E6B14DACD}"/>
               </a:ext>
             </a:extLst>
           </p:cNvPr>
@@ -7700,7 +7696,7 @@
           <p:cNvPr id="14" name="TextBox 13">
             <a:extLst>
               <a:ext uri="{FF2B5EF4-FFF2-40B4-BE49-F238E27FC236}">
-                <a16:creationId xmlns:a16="http://schemas.microsoft.com/office/drawing/2014/main" xmlns="" id="{6FC5AE28-BED6-421B-AB92-65525C582053}"/>
+                <a16:creationId xmlns:a16="http://schemas.microsoft.com/office/drawing/2014/main" id="{6FC5AE28-BED6-421B-AB92-65525C582053}"/>
               </a:ext>
             </a:extLst>
           </p:cNvPr>
@@ -7770,7 +7766,7 @@
           <p:cNvPr id="2" name="Заголовок 1">
             <a:extLst>
               <a:ext uri="{FF2B5EF4-FFF2-40B4-BE49-F238E27FC236}">
-                <a16:creationId xmlns:a16="http://schemas.microsoft.com/office/drawing/2014/main" xmlns="" id="{3A6DA7CB-5539-4DF0-ADC9-C00030B42026}"/>
+                <a16:creationId xmlns:a16="http://schemas.microsoft.com/office/drawing/2014/main" id="{3A6DA7CB-5539-4DF0-ADC9-C00030B42026}"/>
               </a:ext>
             </a:extLst>
           </p:cNvPr>
@@ -7798,7 +7794,7 @@
           <p:cNvPr id="3" name="Объект 2">
             <a:extLst>
               <a:ext uri="{FF2B5EF4-FFF2-40B4-BE49-F238E27FC236}">
-                <a16:creationId xmlns:a16="http://schemas.microsoft.com/office/drawing/2014/main" xmlns="" id="{88B20509-77E2-414F-B499-E06CB10CC996}"/>
+                <a16:creationId xmlns:a16="http://schemas.microsoft.com/office/drawing/2014/main" id="{88B20509-77E2-414F-B499-E06CB10CC996}"/>
               </a:ext>
             </a:extLst>
           </p:cNvPr>
@@ -7823,7 +7819,7 @@
           <p:cNvPr id="4" name="Номер слайда 3">
             <a:extLst>
               <a:ext uri="{FF2B5EF4-FFF2-40B4-BE49-F238E27FC236}">
-                <a16:creationId xmlns:a16="http://schemas.microsoft.com/office/drawing/2014/main" xmlns="" id="{4D37AD5B-6C3D-4DF0-AFB2-955C55233C1F}"/>
+                <a16:creationId xmlns:a16="http://schemas.microsoft.com/office/drawing/2014/main" id="{4D37AD5B-6C3D-4DF0-AFB2-955C55233C1F}"/>
               </a:ext>
             </a:extLst>
           </p:cNvPr>
@@ -7903,17 +7899,9 @@
               <a:rPr lang="ru-RU" dirty="0"/>
               <a:t>Прикладное мостостроение</a:t>
             </a:r>
-            <a:r>
-              <a:rPr lang="en-US" dirty="0"/>
-              <a:t/>
-            </a:r>
             <a:br>
               <a:rPr lang="en-US" dirty="0"/>
             </a:br>
-            <a:r>
-              <a:rPr lang="en-US" dirty="0"/>
-              <a:t/>
-            </a:r>
             <a:br>
               <a:rPr lang="en-US" dirty="0"/>
             </a:br>
@@ -7951,9 +7939,10 @@
           </a:p>
           <a:p>
             <a:r>
-              <a:rPr lang="ru-RU" dirty="0"/>
-              <a:t>МИФИ 2025</a:t>
-            </a:r>
+              <a:rPr lang="ru-RU"/>
+              <a:t>МИФИ 2026</a:t>
+            </a:r>
+            <a:endParaRPr lang="ru-RU" dirty="0"/>
           </a:p>
         </p:txBody>
       </p:sp>
@@ -7962,7 +7951,7 @@
           <p:cNvPr id="4" name="TextBox 3">
             <a:extLst>
               <a:ext uri="{FF2B5EF4-FFF2-40B4-BE49-F238E27FC236}">
-                <a16:creationId xmlns:a16="http://schemas.microsoft.com/office/drawing/2014/main" xmlns="" id="{34B12DB4-1AF2-4CBF-8D01-53B47F83B95E}"/>
+                <a16:creationId xmlns:a16="http://schemas.microsoft.com/office/drawing/2014/main" id="{34B12DB4-1AF2-4CBF-8D01-53B47F83B95E}"/>
               </a:ext>
             </a:extLst>
           </p:cNvPr>
@@ -8032,7 +8021,7 @@
           <p:cNvPr id="2" name="Заголовок 1">
             <a:extLst>
               <a:ext uri="{FF2B5EF4-FFF2-40B4-BE49-F238E27FC236}">
-                <a16:creationId xmlns:a16="http://schemas.microsoft.com/office/drawing/2014/main" xmlns="" id="{E1B83884-D444-4583-BE06-D94A5979E1A7}"/>
+                <a16:creationId xmlns:a16="http://schemas.microsoft.com/office/drawing/2014/main" id="{E1B83884-D444-4583-BE06-D94A5979E1A7}"/>
               </a:ext>
             </a:extLst>
           </p:cNvPr>
@@ -8060,7 +8049,7 @@
           <p:cNvPr id="3" name="Объект 2">
             <a:extLst>
               <a:ext uri="{FF2B5EF4-FFF2-40B4-BE49-F238E27FC236}">
-                <a16:creationId xmlns:a16="http://schemas.microsoft.com/office/drawing/2014/main" xmlns="" id="{99469E88-CC16-4425-B7E6-E339F726C857}"/>
+                <a16:creationId xmlns:a16="http://schemas.microsoft.com/office/drawing/2014/main" id="{99469E88-CC16-4425-B7E6-E339F726C857}"/>
               </a:ext>
             </a:extLst>
           </p:cNvPr>
@@ -8098,7 +8087,7 @@
           <p:cNvPr id="4" name="Номер слайда 3">
             <a:extLst>
               <a:ext uri="{FF2B5EF4-FFF2-40B4-BE49-F238E27FC236}">
-                <a16:creationId xmlns:a16="http://schemas.microsoft.com/office/drawing/2014/main" xmlns="" id="{0F95AF13-AF29-4C9B-9759-5DCF3FDF643B}"/>
+                <a16:creationId xmlns:a16="http://schemas.microsoft.com/office/drawing/2014/main" id="{0F95AF13-AF29-4C9B-9759-5DCF3FDF643B}"/>
               </a:ext>
             </a:extLst>
           </p:cNvPr>
@@ -8127,7 +8116,7 @@
           <p:cNvPr id="10" name="Рисунок 9">
             <a:extLst>
               <a:ext uri="{FF2B5EF4-FFF2-40B4-BE49-F238E27FC236}">
-                <a16:creationId xmlns:a16="http://schemas.microsoft.com/office/drawing/2014/main" xmlns="" id="{5384A785-C173-4A26-9EDD-7C04071AF2B5}"/>
+                <a16:creationId xmlns:a16="http://schemas.microsoft.com/office/drawing/2014/main" id="{5384A785-C173-4A26-9EDD-7C04071AF2B5}"/>
               </a:ext>
             </a:extLst>
           </p:cNvPr>
@@ -8163,7 +8152,7 @@
           <p:cNvPr id="14" name="Рисунок 13">
             <a:extLst>
               <a:ext uri="{FF2B5EF4-FFF2-40B4-BE49-F238E27FC236}">
-                <a16:creationId xmlns:a16="http://schemas.microsoft.com/office/drawing/2014/main" xmlns="" id="{DD7C776D-CE5A-477B-921B-AA499829EED8}"/>
+                <a16:creationId xmlns:a16="http://schemas.microsoft.com/office/drawing/2014/main" id="{DD7C776D-CE5A-477B-921B-AA499829EED8}"/>
               </a:ext>
             </a:extLst>
           </p:cNvPr>
@@ -8299,7 +8288,7 @@
           <p:cNvPr id="2" name="Заголовок 1">
             <a:extLst>
               <a:ext uri="{FF2B5EF4-FFF2-40B4-BE49-F238E27FC236}">
-                <a16:creationId xmlns:a16="http://schemas.microsoft.com/office/drawing/2014/main" xmlns="" id="{90DAE248-EB2B-4755-9CE0-D7DE069642E7}"/>
+                <a16:creationId xmlns:a16="http://schemas.microsoft.com/office/drawing/2014/main" id="{90DAE248-EB2B-4755-9CE0-D7DE069642E7}"/>
               </a:ext>
             </a:extLst>
           </p:cNvPr>
@@ -8327,7 +8316,7 @@
           <p:cNvPr id="4" name="Номер слайда 3">
             <a:extLst>
               <a:ext uri="{FF2B5EF4-FFF2-40B4-BE49-F238E27FC236}">
-                <a16:creationId xmlns:a16="http://schemas.microsoft.com/office/drawing/2014/main" xmlns="" id="{5C9A34F6-4F1D-4746-98FC-B8A48B858297}"/>
+                <a16:creationId xmlns:a16="http://schemas.microsoft.com/office/drawing/2014/main" id="{5C9A34F6-4F1D-4746-98FC-B8A48B858297}"/>
               </a:ext>
             </a:extLst>
           </p:cNvPr>
@@ -8356,7 +8345,7 @@
           <p:cNvPr id="8" name="Прямоугольник 7">
             <a:extLst>
               <a:ext uri="{FF2B5EF4-FFF2-40B4-BE49-F238E27FC236}">
-                <a16:creationId xmlns:a16="http://schemas.microsoft.com/office/drawing/2014/main" xmlns="" id="{C5C6D00E-0C13-41E4-B7F4-D5B9E8B96A75}"/>
+                <a16:creationId xmlns:a16="http://schemas.microsoft.com/office/drawing/2014/main" id="{C5C6D00E-0C13-41E4-B7F4-D5B9E8B96A75}"/>
               </a:ext>
             </a:extLst>
           </p:cNvPr>
@@ -8405,7 +8394,7 @@
           <p:cNvPr id="9" name="Прямоугольник 8">
             <a:extLst>
               <a:ext uri="{FF2B5EF4-FFF2-40B4-BE49-F238E27FC236}">
-                <a16:creationId xmlns:a16="http://schemas.microsoft.com/office/drawing/2014/main" xmlns="" id="{AABA0C71-95BC-4792-AF69-282F4C3AE222}"/>
+                <a16:creationId xmlns:a16="http://schemas.microsoft.com/office/drawing/2014/main" id="{AABA0C71-95BC-4792-AF69-282F4C3AE222}"/>
               </a:ext>
             </a:extLst>
           </p:cNvPr>
@@ -8454,7 +8443,7 @@
           <p:cNvPr id="11" name="Рисунок 10">
             <a:extLst>
               <a:ext uri="{FF2B5EF4-FFF2-40B4-BE49-F238E27FC236}">
-                <a16:creationId xmlns:a16="http://schemas.microsoft.com/office/drawing/2014/main" xmlns="" id="{0A664895-8511-475A-997E-2D74F7B497D5}"/>
+                <a16:creationId xmlns:a16="http://schemas.microsoft.com/office/drawing/2014/main" id="{0A664895-8511-475A-997E-2D74F7B497D5}"/>
               </a:ext>
             </a:extLst>
           </p:cNvPr>
@@ -8490,7 +8479,7 @@
           <p:cNvPr id="12" name="Прямоугольник 11">
             <a:extLst>
               <a:ext uri="{FF2B5EF4-FFF2-40B4-BE49-F238E27FC236}">
-                <a16:creationId xmlns:a16="http://schemas.microsoft.com/office/drawing/2014/main" xmlns="" id="{782B7E91-B4E0-4A47-9EDC-A8C5C2D35E90}"/>
+                <a16:creationId xmlns:a16="http://schemas.microsoft.com/office/drawing/2014/main" id="{782B7E91-B4E0-4A47-9EDC-A8C5C2D35E90}"/>
               </a:ext>
             </a:extLst>
           </p:cNvPr>
@@ -8539,7 +8528,7 @@
           <p:cNvPr id="14" name="Прямая со стрелкой 13">
             <a:extLst>
               <a:ext uri="{FF2B5EF4-FFF2-40B4-BE49-F238E27FC236}">
-                <a16:creationId xmlns:a16="http://schemas.microsoft.com/office/drawing/2014/main" xmlns="" id="{494AE664-36D8-43A5-A2F3-EE57FD834D74}"/>
+                <a16:creationId xmlns:a16="http://schemas.microsoft.com/office/drawing/2014/main" id="{494AE664-36D8-43A5-A2F3-EE57FD834D74}"/>
               </a:ext>
             </a:extLst>
           </p:cNvPr>
@@ -8582,7 +8571,7 @@
           <p:cNvPr id="17" name="Прямая со стрелкой 16">
             <a:extLst>
               <a:ext uri="{FF2B5EF4-FFF2-40B4-BE49-F238E27FC236}">
-                <a16:creationId xmlns:a16="http://schemas.microsoft.com/office/drawing/2014/main" xmlns="" id="{40528B61-805F-44BD-87D2-473C9288BE3A}"/>
+                <a16:creationId xmlns:a16="http://schemas.microsoft.com/office/drawing/2014/main" id="{40528B61-805F-44BD-87D2-473C9288BE3A}"/>
               </a:ext>
             </a:extLst>
           </p:cNvPr>
@@ -8625,7 +8614,7 @@
           <p:cNvPr id="21" name="Прямая со стрелкой 20">
             <a:extLst>
               <a:ext uri="{FF2B5EF4-FFF2-40B4-BE49-F238E27FC236}">
-                <a16:creationId xmlns:a16="http://schemas.microsoft.com/office/drawing/2014/main" xmlns="" id="{FCE5B01E-851E-42F5-8287-5ADFB3870352}"/>
+                <a16:creationId xmlns:a16="http://schemas.microsoft.com/office/drawing/2014/main" id="{FCE5B01E-851E-42F5-8287-5ADFB3870352}"/>
               </a:ext>
             </a:extLst>
           </p:cNvPr>
@@ -8668,7 +8657,7 @@
           <p:cNvPr id="26" name="Объект 2">
             <a:extLst>
               <a:ext uri="{FF2B5EF4-FFF2-40B4-BE49-F238E27FC236}">
-                <a16:creationId xmlns:a16="http://schemas.microsoft.com/office/drawing/2014/main" xmlns="" id="{B32C4AF2-B1AA-48F2-9D3D-6012156992B6}"/>
+                <a16:creationId xmlns:a16="http://schemas.microsoft.com/office/drawing/2014/main" id="{B32C4AF2-B1AA-48F2-9D3D-6012156992B6}"/>
               </a:ext>
             </a:extLst>
           </p:cNvPr>
@@ -8779,7 +8768,7 @@
           <p:cNvPr id="2" name="Заголовок 1">
             <a:extLst>
               <a:ext uri="{FF2B5EF4-FFF2-40B4-BE49-F238E27FC236}">
-                <a16:creationId xmlns:a16="http://schemas.microsoft.com/office/drawing/2014/main" xmlns="" id="{31CC3AF5-395C-444A-A396-FF7CD386E6BE}"/>
+                <a16:creationId xmlns:a16="http://schemas.microsoft.com/office/drawing/2014/main" id="{31CC3AF5-395C-444A-A396-FF7CD386E6BE}"/>
               </a:ext>
             </a:extLst>
           </p:cNvPr>
@@ -8809,7 +8798,7 @@
               <p:cNvPr id="3" name="Объект 2">
                 <a:extLst>
                   <a:ext uri="{FF2B5EF4-FFF2-40B4-BE49-F238E27FC236}">
-                    <a16:creationId xmlns:a16="http://schemas.microsoft.com/office/drawing/2014/main" xmlns="" id="{19B43A81-AEC9-467F-917D-830B0AC98511}"/>
+                    <a16:creationId xmlns:a16="http://schemas.microsoft.com/office/drawing/2014/main" id="{19B43A81-AEC9-467F-917D-830B0AC98511}"/>
                   </a:ext>
                 </a:extLst>
               </p:cNvPr>
@@ -9157,7 +9146,7 @@
           <p:cNvPr id="4" name="Номер слайда 3">
             <a:extLst>
               <a:ext uri="{FF2B5EF4-FFF2-40B4-BE49-F238E27FC236}">
-                <a16:creationId xmlns:a16="http://schemas.microsoft.com/office/drawing/2014/main" xmlns="" id="{8CCF934F-93F1-407B-B004-90AE340E9AF3}"/>
+                <a16:creationId xmlns:a16="http://schemas.microsoft.com/office/drawing/2014/main" id="{8CCF934F-93F1-407B-B004-90AE340E9AF3}"/>
               </a:ext>
             </a:extLst>
           </p:cNvPr>
@@ -9186,7 +9175,7 @@
           <p:cNvPr id="5" name="Рисунок 4">
             <a:extLst>
               <a:ext uri="{FF2B5EF4-FFF2-40B4-BE49-F238E27FC236}">
-                <a16:creationId xmlns:a16="http://schemas.microsoft.com/office/drawing/2014/main" xmlns="" id="{961202E5-14F9-44D3-AC34-E82FF784700C}"/>
+                <a16:creationId xmlns:a16="http://schemas.microsoft.com/office/drawing/2014/main" id="{961202E5-14F9-44D3-AC34-E82FF784700C}"/>
               </a:ext>
             </a:extLst>
           </p:cNvPr>
@@ -9222,7 +9211,7 @@
           <p:cNvPr id="6" name="TextBox 5">
             <a:extLst>
               <a:ext uri="{FF2B5EF4-FFF2-40B4-BE49-F238E27FC236}">
-                <a16:creationId xmlns:a16="http://schemas.microsoft.com/office/drawing/2014/main" xmlns="" id="{E70A8033-ED4B-4890-8DDE-4AA6E4AD5A6E}"/>
+                <a16:creationId xmlns:a16="http://schemas.microsoft.com/office/drawing/2014/main" id="{E70A8033-ED4B-4890-8DDE-4AA6E4AD5A6E}"/>
               </a:ext>
             </a:extLst>
           </p:cNvPr>
@@ -9257,7 +9246,7 @@
           <p:cNvPr id="7" name="TextBox 6">
             <a:extLst>
               <a:ext uri="{FF2B5EF4-FFF2-40B4-BE49-F238E27FC236}">
-                <a16:creationId xmlns:a16="http://schemas.microsoft.com/office/drawing/2014/main" xmlns="" id="{013E5A94-F772-4779-AC2F-EF7D252A5EA7}"/>
+                <a16:creationId xmlns:a16="http://schemas.microsoft.com/office/drawing/2014/main" id="{013E5A94-F772-4779-AC2F-EF7D252A5EA7}"/>
               </a:ext>
             </a:extLst>
           </p:cNvPr>
@@ -9292,7 +9281,7 @@
           <p:cNvPr id="8" name="TextBox 7">
             <a:extLst>
               <a:ext uri="{FF2B5EF4-FFF2-40B4-BE49-F238E27FC236}">
-                <a16:creationId xmlns:a16="http://schemas.microsoft.com/office/drawing/2014/main" xmlns="" id="{D9CA2F0D-EFF3-47BD-AE5A-364DD9D0F9EC}"/>
+                <a16:creationId xmlns:a16="http://schemas.microsoft.com/office/drawing/2014/main" id="{D9CA2F0D-EFF3-47BD-AE5A-364DD9D0F9EC}"/>
               </a:ext>
             </a:extLst>
           </p:cNvPr>
@@ -9327,7 +9316,7 @@
           <p:cNvPr id="10" name="Соединитель: изогнутый 9">
             <a:extLst>
               <a:ext uri="{FF2B5EF4-FFF2-40B4-BE49-F238E27FC236}">
-                <a16:creationId xmlns:a16="http://schemas.microsoft.com/office/drawing/2014/main" xmlns="" id="{8363652A-1D79-4460-87BB-236C6B7AFD80}"/>
+                <a16:creationId xmlns:a16="http://schemas.microsoft.com/office/drawing/2014/main" id="{8363652A-1D79-4460-87BB-236C6B7AFD80}"/>
               </a:ext>
             </a:extLst>
           </p:cNvPr>
@@ -9372,7 +9361,7 @@
           <p:cNvPr id="16" name="Соединитель: изогнутый 15">
             <a:extLst>
               <a:ext uri="{FF2B5EF4-FFF2-40B4-BE49-F238E27FC236}">
-                <a16:creationId xmlns:a16="http://schemas.microsoft.com/office/drawing/2014/main" xmlns="" id="{3F19AAD0-7AFD-45A3-8073-705FA33DF691}"/>
+                <a16:creationId xmlns:a16="http://schemas.microsoft.com/office/drawing/2014/main" id="{3F19AAD0-7AFD-45A3-8073-705FA33DF691}"/>
               </a:ext>
             </a:extLst>
           </p:cNvPr>
@@ -9416,7 +9405,7 @@
           <p:cNvPr id="20" name="Соединитель: изогнутый 19">
             <a:extLst>
               <a:ext uri="{FF2B5EF4-FFF2-40B4-BE49-F238E27FC236}">
-                <a16:creationId xmlns:a16="http://schemas.microsoft.com/office/drawing/2014/main" xmlns="" id="{0A0DA59B-B728-4D08-8514-7CED0FD98783}"/>
+                <a16:creationId xmlns:a16="http://schemas.microsoft.com/office/drawing/2014/main" id="{0A0DA59B-B728-4D08-8514-7CED0FD98783}"/>
               </a:ext>
             </a:extLst>
           </p:cNvPr>
@@ -10001,7 +9990,7 @@
           <p:cNvPr id="10" name="Прямоугольник 9">
             <a:extLst>
               <a:ext uri="{FF2B5EF4-FFF2-40B4-BE49-F238E27FC236}">
-                <a16:creationId xmlns:a16="http://schemas.microsoft.com/office/drawing/2014/main" xmlns="" id="{81B2B077-533D-4081-8EB7-95F769E65E96}"/>
+                <a16:creationId xmlns:a16="http://schemas.microsoft.com/office/drawing/2014/main" id="{81B2B077-533D-4081-8EB7-95F769E65E96}"/>
               </a:ext>
             </a:extLst>
           </p:cNvPr>
@@ -10050,7 +10039,7 @@
           <p:cNvPr id="11" name="Прямоугольник 10">
             <a:extLst>
               <a:ext uri="{FF2B5EF4-FFF2-40B4-BE49-F238E27FC236}">
-                <a16:creationId xmlns:a16="http://schemas.microsoft.com/office/drawing/2014/main" xmlns="" id="{F64CA5FB-2463-4F64-B138-B1272180C4AF}"/>
+                <a16:creationId xmlns:a16="http://schemas.microsoft.com/office/drawing/2014/main" id="{F64CA5FB-2463-4F64-B138-B1272180C4AF}"/>
               </a:ext>
             </a:extLst>
           </p:cNvPr>
@@ -10099,7 +10088,7 @@
           <p:cNvPr id="12" name="Прямая со стрелкой 11">
             <a:extLst>
               <a:ext uri="{FF2B5EF4-FFF2-40B4-BE49-F238E27FC236}">
-                <a16:creationId xmlns:a16="http://schemas.microsoft.com/office/drawing/2014/main" xmlns="" id="{819A8699-F4F6-452A-B1FD-6E2A303B5BA5}"/>
+                <a16:creationId xmlns:a16="http://schemas.microsoft.com/office/drawing/2014/main" id="{819A8699-F4F6-452A-B1FD-6E2A303B5BA5}"/>
               </a:ext>
             </a:extLst>
           </p:cNvPr>
@@ -10141,7 +10130,7 @@
           <p:cNvPr id="14" name="Прямая со стрелкой 13">
             <a:extLst>
               <a:ext uri="{FF2B5EF4-FFF2-40B4-BE49-F238E27FC236}">
-                <a16:creationId xmlns:a16="http://schemas.microsoft.com/office/drawing/2014/main" xmlns="" id="{5B7CBCB1-F574-4A66-9ECB-9931638EF107}"/>
+                <a16:creationId xmlns:a16="http://schemas.microsoft.com/office/drawing/2014/main" id="{5B7CBCB1-F574-4A66-9ECB-9931638EF107}"/>
               </a:ext>
             </a:extLst>
           </p:cNvPr>
@@ -10210,7 +10199,7 @@
           <p:cNvPr id="2" name="Заголовок 1">
             <a:extLst>
               <a:ext uri="{FF2B5EF4-FFF2-40B4-BE49-F238E27FC236}">
-                <a16:creationId xmlns:a16="http://schemas.microsoft.com/office/drawing/2014/main" xmlns="" id="{657E4F17-C449-4ECB-8040-39580584E796}"/>
+                <a16:creationId xmlns:a16="http://schemas.microsoft.com/office/drawing/2014/main" id="{657E4F17-C449-4ECB-8040-39580584E796}"/>
               </a:ext>
             </a:extLst>
           </p:cNvPr>
@@ -10238,7 +10227,7 @@
           <p:cNvPr id="3" name="Объект 2">
             <a:extLst>
               <a:ext uri="{FF2B5EF4-FFF2-40B4-BE49-F238E27FC236}">
-                <a16:creationId xmlns:a16="http://schemas.microsoft.com/office/drawing/2014/main" xmlns="" id="{2BA8D77E-0C48-4EFA-AD22-A21035814ED9}"/>
+                <a16:creationId xmlns:a16="http://schemas.microsoft.com/office/drawing/2014/main" id="{2BA8D77E-0C48-4EFA-AD22-A21035814ED9}"/>
               </a:ext>
             </a:extLst>
           </p:cNvPr>
@@ -10263,7 +10252,7 @@
           <p:cNvPr id="4" name="Номер слайда 3">
             <a:extLst>
               <a:ext uri="{FF2B5EF4-FFF2-40B4-BE49-F238E27FC236}">
-                <a16:creationId xmlns:a16="http://schemas.microsoft.com/office/drawing/2014/main" xmlns="" id="{98B9085A-D1CC-475E-BD9B-F373EF5DFA4E}"/>
+                <a16:creationId xmlns:a16="http://schemas.microsoft.com/office/drawing/2014/main" id="{98B9085A-D1CC-475E-BD9B-F373EF5DFA4E}"/>
               </a:ext>
             </a:extLst>
           </p:cNvPr>
@@ -11084,8 +11073,8 @@
           </a:p>
         </p:txBody>
       </p:sp>
-      <mc:AlternateContent xmlns:mc="http://schemas.openxmlformats.org/markup-compatibility/2006" xmlns:a14="http://schemas.microsoft.com/office/drawing/2010/main">
-        <mc:Choice Requires="a14">
+      <mc:AlternateContent xmlns:mc="http://schemas.openxmlformats.org/markup-compatibility/2006">
+        <mc:Choice xmlns:a14="http://schemas.microsoft.com/office/drawing/2010/main" Requires="a14">
           <p:sp>
             <p:nvSpPr>
               <p:cNvPr id="3" name="Объект 2"/>
@@ -11125,8 +11114,12 @@
                   <a:t> – </a:t>
                 </a:r>
                 <a:r>
+                  <a:rPr lang="ru-RU" b="1" dirty="0"/>
+                  <a:t>стойкая система</a:t>
+                </a:r>
+                <a:r>
                   <a:rPr lang="ru-RU" dirty="0"/>
-                  <a:t>стойкая система. Показать что система </a:t>
+                  <a:t>. Показать что система </a:t>
                 </a:r>
                 <a14:m>
                   <m:oMath xmlns:m="http://schemas.openxmlformats.org/officeDocument/2006/math">
@@ -11278,7 +11271,7 @@
                   <a:buNone/>
                 </a:pPr>
                 <a:r>
-                  <a:rPr lang="ru-RU" dirty="0">
+                  <a:rPr lang="ru-RU" i="1" dirty="0">
                     <a:ea typeface="Cambria Math" panose="02040503050406030204" pitchFamily="18" charset="0"/>
                   </a:rPr>
                   <a:t>(Строим атаку на систему </a:t>
@@ -11295,7 +11288,7 @@
                   </m:oMath>
                 </a14:m>
                 <a:r>
-                  <a:rPr lang="en-US" b="0" i="0" dirty="0">
+                  <a:rPr lang="en-US" b="0" i="1" dirty="0">
                     <a:ea typeface="Cambria Math" panose="02040503050406030204" pitchFamily="18" charset="0"/>
                   </a:rPr>
                   <a:t>).</a:t>
@@ -11438,7 +11431,19 @@
                   <a:rPr lang="ru-RU" b="0" i="0" dirty="0">
                     <a:ea typeface="Cambria Math" panose="02040503050406030204" pitchFamily="18" charset="0"/>
                   </a:rPr>
-                  <a:t> – стойкая, следовательно предположение не верно и </a:t>
+                  <a:t> – </a:t>
+                </a:r>
+                <a:r>
+                  <a:rPr lang="ru-RU" b="1" i="0" dirty="0">
+                    <a:ea typeface="Cambria Math" panose="02040503050406030204" pitchFamily="18" charset="0"/>
+                  </a:rPr>
+                  <a:t>стойкая</a:t>
+                </a:r>
+                <a:r>
+                  <a:rPr lang="ru-RU" b="0" i="0" dirty="0">
+                    <a:ea typeface="Cambria Math" panose="02040503050406030204" pitchFamily="18" charset="0"/>
+                  </a:rPr>
+                  <a:t>, следовательно предположение не верно и </a:t>
                 </a:r>
                 <a14:m>
                   <m:oMath xmlns:m="http://schemas.openxmlformats.org/officeDocument/2006/math">
@@ -11480,7 +11485,7 @@
             </p:txBody>
           </p:sp>
         </mc:Choice>
-        <mc:Fallback xmlns="">
+        <mc:Fallback>
           <p:sp>
             <p:nvSpPr>
               <p:cNvPr id="3" name="Объект 2"/>
@@ -11492,7 +11497,7 @@
               </p:nvPr>
             </p:nvSpPr>
             <p:spPr>
-              <a:blipFill rotWithShape="0">
+              <a:blipFill>
                 <a:blip r:embed="rId2"/>
                 <a:stretch>
                   <a:fillRect l="-1043" t="-2101"/>
@@ -12475,7 +12480,7 @@
           <p:cNvPr id="2" name="Заголовок 1">
             <a:extLst>
               <a:ext uri="{FF2B5EF4-FFF2-40B4-BE49-F238E27FC236}">
-                <a16:creationId xmlns:a16="http://schemas.microsoft.com/office/drawing/2014/main" xmlns="" id="{10F75200-5298-4AA3-86A8-2AA97163C187}"/>
+                <a16:creationId xmlns:a16="http://schemas.microsoft.com/office/drawing/2014/main" id="{10F75200-5298-4AA3-86A8-2AA97163C187}"/>
               </a:ext>
             </a:extLst>
           </p:cNvPr>
@@ -12503,7 +12508,7 @@
           <p:cNvPr id="3" name="Объект 2">
             <a:extLst>
               <a:ext uri="{FF2B5EF4-FFF2-40B4-BE49-F238E27FC236}">
-                <a16:creationId xmlns:a16="http://schemas.microsoft.com/office/drawing/2014/main" xmlns="" id="{339B1912-DC92-43CF-A2A7-29076716E59D}"/>
+                <a16:creationId xmlns:a16="http://schemas.microsoft.com/office/drawing/2014/main" id="{339B1912-DC92-43CF-A2A7-29076716E59D}"/>
               </a:ext>
             </a:extLst>
           </p:cNvPr>
@@ -12576,7 +12581,7 @@
           <p:cNvPr id="4" name="Номер слайда 3">
             <a:extLst>
               <a:ext uri="{FF2B5EF4-FFF2-40B4-BE49-F238E27FC236}">
-                <a16:creationId xmlns:a16="http://schemas.microsoft.com/office/drawing/2014/main" xmlns="" id="{5C499FFA-524C-41B4-B7F2-80725B645A2C}"/>
+                <a16:creationId xmlns:a16="http://schemas.microsoft.com/office/drawing/2014/main" id="{5C499FFA-524C-41B4-B7F2-80725B645A2C}"/>
               </a:ext>
             </a:extLst>
           </p:cNvPr>
@@ -12605,7 +12610,7 @@
           <p:cNvPr id="5" name="Прямоугольник 4">
             <a:extLst>
               <a:ext uri="{FF2B5EF4-FFF2-40B4-BE49-F238E27FC236}">
-                <a16:creationId xmlns:a16="http://schemas.microsoft.com/office/drawing/2014/main" xmlns="" id="{F0A9815A-24D0-42BF-A29E-3B100F16CF7C}"/>
+                <a16:creationId xmlns:a16="http://schemas.microsoft.com/office/drawing/2014/main" id="{F0A9815A-24D0-42BF-A29E-3B100F16CF7C}"/>
               </a:ext>
             </a:extLst>
           </p:cNvPr>
@@ -12654,7 +12659,7 @@
           <p:cNvPr id="6" name="Прямоугольник 5">
             <a:extLst>
               <a:ext uri="{FF2B5EF4-FFF2-40B4-BE49-F238E27FC236}">
-                <a16:creationId xmlns:a16="http://schemas.microsoft.com/office/drawing/2014/main" xmlns="" id="{67E0D0CA-71D8-43B5-BDF8-4F0F91CC42C2}"/>
+                <a16:creationId xmlns:a16="http://schemas.microsoft.com/office/drawing/2014/main" id="{67E0D0CA-71D8-43B5-BDF8-4F0F91CC42C2}"/>
               </a:ext>
             </a:extLst>
           </p:cNvPr>
@@ -12703,7 +12708,7 @@
           <p:cNvPr id="7" name="Рисунок 6">
             <a:extLst>
               <a:ext uri="{FF2B5EF4-FFF2-40B4-BE49-F238E27FC236}">
-                <a16:creationId xmlns:a16="http://schemas.microsoft.com/office/drawing/2014/main" xmlns="" id="{A643011A-949A-4C3E-ABBB-76ADBF150524}"/>
+                <a16:creationId xmlns:a16="http://schemas.microsoft.com/office/drawing/2014/main" id="{A643011A-949A-4C3E-ABBB-76ADBF150524}"/>
               </a:ext>
             </a:extLst>
           </p:cNvPr>
@@ -12739,7 +12744,7 @@
           <p:cNvPr id="8" name="Прямоугольник 7">
             <a:extLst>
               <a:ext uri="{FF2B5EF4-FFF2-40B4-BE49-F238E27FC236}">
-                <a16:creationId xmlns:a16="http://schemas.microsoft.com/office/drawing/2014/main" xmlns="" id="{BB72BCA3-51A6-466F-BC42-F40A5164E112}"/>
+                <a16:creationId xmlns:a16="http://schemas.microsoft.com/office/drawing/2014/main" id="{BB72BCA3-51A6-466F-BC42-F40A5164E112}"/>
               </a:ext>
             </a:extLst>
           </p:cNvPr>
@@ -12788,7 +12793,7 @@
           <p:cNvPr id="9" name="Прямая со стрелкой 8">
             <a:extLst>
               <a:ext uri="{FF2B5EF4-FFF2-40B4-BE49-F238E27FC236}">
-                <a16:creationId xmlns:a16="http://schemas.microsoft.com/office/drawing/2014/main" xmlns="" id="{F97DF5F6-F95C-4918-BC54-14EA7443B624}"/>
+                <a16:creationId xmlns:a16="http://schemas.microsoft.com/office/drawing/2014/main" id="{F97DF5F6-F95C-4918-BC54-14EA7443B624}"/>
               </a:ext>
             </a:extLst>
           </p:cNvPr>
@@ -12831,7 +12836,7 @@
           <p:cNvPr id="10" name="Прямая со стрелкой 9">
             <a:extLst>
               <a:ext uri="{FF2B5EF4-FFF2-40B4-BE49-F238E27FC236}">
-                <a16:creationId xmlns:a16="http://schemas.microsoft.com/office/drawing/2014/main" xmlns="" id="{7CD1CD34-1EB7-4201-A5BC-5DC847B5F488}"/>
+                <a16:creationId xmlns:a16="http://schemas.microsoft.com/office/drawing/2014/main" id="{7CD1CD34-1EB7-4201-A5BC-5DC847B5F488}"/>
               </a:ext>
             </a:extLst>
           </p:cNvPr>
@@ -12874,7 +12879,7 @@
           <p:cNvPr id="11" name="Прямая со стрелкой 10">
             <a:extLst>
               <a:ext uri="{FF2B5EF4-FFF2-40B4-BE49-F238E27FC236}">
-                <a16:creationId xmlns:a16="http://schemas.microsoft.com/office/drawing/2014/main" xmlns="" id="{62D94838-8D1E-4A10-BD49-2C5AED70A9C6}"/>
+                <a16:creationId xmlns:a16="http://schemas.microsoft.com/office/drawing/2014/main" id="{62D94838-8D1E-4A10-BD49-2C5AED70A9C6}"/>
               </a:ext>
             </a:extLst>
           </p:cNvPr>
@@ -16547,8 +16552,8 @@
           </a:p>
         </p:txBody>
       </p:sp>
-      <mc:AlternateContent xmlns:mc="http://schemas.openxmlformats.org/markup-compatibility/2006">
-        <mc:Choice xmlns:a14="http://schemas.microsoft.com/office/drawing/2010/main" Requires="a14">
+      <mc:AlternateContent xmlns:mc="http://schemas.openxmlformats.org/markup-compatibility/2006" xmlns:a14="http://schemas.microsoft.com/office/drawing/2010/main">
+        <mc:Choice Requires="a14">
           <p:sp>
             <p:nvSpPr>
               <p:cNvPr id="3" name="Объект 2"/>
@@ -16739,11 +16744,7 @@
                 </a:r>
                 <a:r>
                   <a:rPr lang="ru-RU" dirty="0"/>
-                  <a:t>если не указано явно иное распределение</a:t>
-                </a:r>
-                <a:r>
-                  <a:rPr lang="ru-RU" dirty="0" smtClean="0"/>
-                  <a:t>)</a:t>
+                  <a:t>если не указано явно иное распределение)</a:t>
                 </a:r>
               </a:p>
               <a:p>
@@ -16799,18 +16800,14 @@
                 </a14:m>
                 <a:r>
                   <a:rPr lang="ru-RU" dirty="0"/>
-                  <a:t> – </a:t>
-                </a:r>
-                <a:r>
-                  <a:rPr lang="ru-RU" dirty="0" smtClean="0"/>
-                  <a:t>вычисление </a:t>
-                </a:r>
-                <a:r>
-                  <a:rPr lang="ru-RU" dirty="0" err="1" smtClean="0"/>
+                  <a:t> – вычисление </a:t>
+                </a:r>
+                <a:r>
+                  <a:rPr lang="ru-RU" dirty="0" err="1"/>
                   <a:t>рандомизированной</a:t>
                 </a:r>
                 <a:r>
-                  <a:rPr lang="ru-RU" dirty="0" smtClean="0"/>
+                  <a:rPr lang="ru-RU" dirty="0"/>
                   <a:t> функции </a:t>
                 </a:r>
                 <a14:m>
@@ -16829,14 +16826,14 @@
                     </m:r>
                   </m:oMath>
                 </a14:m>
-                <a:endParaRPr lang="en-US" b="0" dirty="0" smtClean="0"/>
+                <a:endParaRPr lang="en-US" b="0" dirty="0"/>
               </a:p>
               <a:p>
                 <a:pPr marL="0" indent="0">
                   <a:buNone/>
                 </a:pPr>
                 <a:r>
-                  <a:rPr lang="en-US" dirty="0" smtClean="0"/>
+                  <a:rPr lang="en-US" dirty="0"/>
                   <a:t>“</a:t>
                 </a:r>
                 <a14:m>
@@ -16869,15 +16866,15 @@
                   </m:oMath>
                 </a14:m>
                 <a:r>
-                  <a:rPr lang="en-US" b="0" dirty="0" smtClean="0"/>
+                  <a:rPr lang="en-US" b="0" dirty="0"/>
                   <a:t>” </a:t>
                 </a:r>
                 <a:r>
-                  <a:rPr lang="ru-RU" b="0" dirty="0" smtClean="0"/>
+                  <a:rPr lang="ru-RU" b="0" dirty="0"/>
                   <a:t>и </a:t>
                 </a:r>
                 <a:r>
-                  <a:rPr lang="en-US" b="0" dirty="0" smtClean="0"/>
+                  <a:rPr lang="en-US" b="0" dirty="0"/>
                   <a:t>“</a:t>
                 </a:r>
                 <a14:m>
@@ -16907,19 +16904,19 @@
                   </m:oMath>
                 </a14:m>
                 <a:r>
-                  <a:rPr lang="en-US" b="0" dirty="0" smtClean="0"/>
+                  <a:rPr lang="en-US" b="0" dirty="0"/>
                   <a:t>” </a:t>
                 </a:r>
                 <a:r>
-                  <a:rPr lang="ru-RU" dirty="0" smtClean="0"/>
+                  <a:rPr lang="ru-RU" dirty="0"/>
                   <a:t>–</a:t>
                 </a:r>
                 <a:r>
-                  <a:rPr lang="en-US" dirty="0" smtClean="0"/>
+                  <a:rPr lang="en-US" dirty="0"/>
                   <a:t> </a:t>
                 </a:r>
                 <a:r>
-                  <a:rPr lang="ru-RU" smtClean="0"/>
+                  <a:rPr lang="ru-RU"/>
                   <a:t>эквивалентные обозначения.</a:t>
                 </a:r>
                 <a:endParaRPr lang="en-US" b="0" dirty="0"/>
@@ -17049,7 +17046,7 @@
             </p:txBody>
           </p:sp>
         </mc:Choice>
-        <mc:Fallback>
+        <mc:Fallback xmlns="">
           <p:sp>
             <p:nvSpPr>
               <p:cNvPr id="3" name="Объект 2"/>
@@ -18325,14 +18322,18 @@
               <a:t> </a:t>
             </a:r>
             <a:r>
-              <a:rPr lang="ru-RU" dirty="0"/>
+              <a:rPr lang="ru-RU" dirty="0">
+                <a:solidFill>
+                  <a:srgbClr val="00B050"/>
+                </a:solidFill>
+              </a:rPr>
               <a:t>переменной длины</a:t>
             </a:r>
           </a:p>
         </p:txBody>
       </p:sp>
-      <mc:AlternateContent xmlns:mc="http://schemas.openxmlformats.org/markup-compatibility/2006" xmlns:a14="http://schemas.microsoft.com/office/drawing/2010/main">
-        <mc:Choice Requires="a14">
+      <mc:AlternateContent xmlns:mc="http://schemas.openxmlformats.org/markup-compatibility/2006">
+        <mc:Choice xmlns:a14="http://schemas.microsoft.com/office/drawing/2010/main" Requires="a14">
           <p:sp>
             <p:nvSpPr>
               <p:cNvPr id="3" name="Объект 2"/>
@@ -18476,25 +18477,37 @@
                       <m:t>,</m:t>
                     </m:r>
                     <m:r>
-                      <a:rPr lang="en-US" i="1">
+                      <a:rPr lang="en-US" i="1" smtClean="0">
+                        <a:solidFill>
+                          <a:srgbClr val="00B050"/>
+                        </a:solidFill>
                         <a:latin typeface="Cambria Math" panose="02040503050406030204" pitchFamily="18" charset="0"/>
                       </a:rPr>
                       <m:t>𝑀</m:t>
                     </m:r>
                     <m:r>
-                      <a:rPr lang="en-US" i="1">
+                      <a:rPr lang="en-US" i="1" smtClean="0">
+                        <a:solidFill>
+                          <a:srgbClr val="00B050"/>
+                        </a:solidFill>
                         <a:latin typeface="Cambria Math" panose="02040503050406030204" pitchFamily="18" charset="0"/>
                       </a:rPr>
                       <m:t>=</m:t>
                     </m:r>
                     <m:r>
-                      <a:rPr lang="en-US" i="1">
+                      <a:rPr lang="en-US" i="1" smtClean="0">
+                        <a:solidFill>
+                          <a:srgbClr val="00B050"/>
+                        </a:solidFill>
                         <a:latin typeface="Cambria Math" panose="02040503050406030204" pitchFamily="18" charset="0"/>
                       </a:rPr>
                       <m:t>𝐶</m:t>
                     </m:r>
                     <m:r>
-                      <a:rPr lang="en-US" i="1">
+                      <a:rPr lang="en-US" i="1" smtClean="0">
+                        <a:solidFill>
+                          <a:srgbClr val="00B050"/>
+                        </a:solidFill>
                         <a:latin typeface="Cambria Math" panose="02040503050406030204" pitchFamily="18" charset="0"/>
                       </a:rPr>
                       <m:t>=</m:t>
@@ -18503,6 +18516,9 @@
                       <m:sSupPr>
                         <m:ctrlPr>
                           <a:rPr lang="en-US" i="1">
+                            <a:solidFill>
+                              <a:srgbClr val="00B050"/>
+                            </a:solidFill>
                             <a:latin typeface="Cambria Math" panose="02040503050406030204" pitchFamily="18" charset="0"/>
                           </a:rPr>
                         </m:ctrlPr>
@@ -18514,6 +18530,9 @@
                             <m:endChr m:val="}"/>
                             <m:ctrlPr>
                               <a:rPr lang="en-US" i="1">
+                                <a:solidFill>
+                                  <a:srgbClr val="00B050"/>
+                                </a:solidFill>
                                 <a:latin typeface="Cambria Math" panose="02040503050406030204" pitchFamily="18" charset="0"/>
                               </a:rPr>
                             </m:ctrlPr>
@@ -18521,6 +18540,9 @@
                           <m:e>
                             <m:r>
                               <a:rPr lang="en-US" i="1">
+                                <a:solidFill>
+                                  <a:srgbClr val="00B050"/>
+                                </a:solidFill>
                                 <a:latin typeface="Cambria Math" panose="02040503050406030204" pitchFamily="18" charset="0"/>
                               </a:rPr>
                               <m:t>0,1</m:t>
@@ -18531,12 +18553,18 @@
                       <m:sup>
                         <m:r>
                           <a:rPr lang="en-US" b="0" i="1" smtClean="0">
+                            <a:solidFill>
+                              <a:srgbClr val="00B050"/>
+                            </a:solidFill>
                             <a:latin typeface="Cambria Math" panose="02040503050406030204" pitchFamily="18" charset="0"/>
                           </a:rPr>
                           <m:t>≤</m:t>
                         </m:r>
                         <m:r>
                           <a:rPr lang="en-US" i="1">
+                            <a:solidFill>
+                              <a:srgbClr val="00B050"/>
+                            </a:solidFill>
                             <a:latin typeface="Cambria Math" panose="02040503050406030204" pitchFamily="18" charset="0"/>
                           </a:rPr>
                           <m:t>𝐿</m:t>
@@ -18758,18 +18786,27 @@
                       </m:r>
                       <m:r>
                         <a:rPr lang="en-US" b="0" i="1" smtClean="0">
+                          <a:solidFill>
+                            <a:srgbClr val="00B050"/>
+                          </a:solidFill>
                           <a:latin typeface="Cambria Math" panose="02040503050406030204" pitchFamily="18" charset="0"/>
                         </a:rPr>
                         <m:t>[0..</m:t>
                       </m:r>
                       <m:r>
                         <a:rPr lang="en-US" b="0" i="1" smtClean="0">
+                          <a:solidFill>
+                            <a:srgbClr val="00B050"/>
+                          </a:solidFill>
                           <a:latin typeface="Cambria Math" panose="02040503050406030204" pitchFamily="18" charset="0"/>
                         </a:rPr>
                         <m:t>𝑙</m:t>
                       </m:r>
                       <m:r>
                         <a:rPr lang="en-US" b="0" i="1" smtClean="0">
+                          <a:solidFill>
+                            <a:srgbClr val="00B050"/>
+                          </a:solidFill>
                           <a:latin typeface="Cambria Math" panose="02040503050406030204" pitchFamily="18" charset="0"/>
                         </a:rPr>
                         <m:t>−1]⊕</m:t>
@@ -18972,18 +19009,27 @@
                       </m:r>
                       <m:r>
                         <a:rPr lang="en-US" b="0" i="1" smtClean="0">
+                          <a:solidFill>
+                            <a:srgbClr val="00B050"/>
+                          </a:solidFill>
                           <a:latin typeface="Cambria Math" panose="02040503050406030204" pitchFamily="18" charset="0"/>
                         </a:rPr>
                         <m:t>[0..</m:t>
                       </m:r>
                       <m:r>
                         <a:rPr lang="en-US" b="0" i="1" smtClean="0">
+                          <a:solidFill>
+                            <a:srgbClr val="00B050"/>
+                          </a:solidFill>
                           <a:latin typeface="Cambria Math" panose="02040503050406030204" pitchFamily="18" charset="0"/>
                         </a:rPr>
                         <m:t>𝑙</m:t>
                       </m:r>
                       <m:r>
                         <a:rPr lang="en-US" b="0" i="1" smtClean="0">
+                          <a:solidFill>
+                            <a:srgbClr val="00B050"/>
+                          </a:solidFill>
                           <a:latin typeface="Cambria Math" panose="02040503050406030204" pitchFamily="18" charset="0"/>
                         </a:rPr>
                         <m:t>−1]⊕</m:t>
@@ -19330,7 +19376,7 @@
             </p:txBody>
           </p:sp>
         </mc:Choice>
-        <mc:Fallback xmlns="">
+        <mc:Fallback>
           <p:sp>
             <p:nvSpPr>
               <p:cNvPr id="3" name="Объект 2"/>
@@ -25159,7 +25205,7 @@
           <p:cNvPr id="5" name="TextBox 4">
             <a:extLst>
               <a:ext uri="{FF2B5EF4-FFF2-40B4-BE49-F238E27FC236}">
-                <a16:creationId xmlns:a16="http://schemas.microsoft.com/office/drawing/2014/main" xmlns="" id="{4D6BF140-4AD6-47B6-B128-F3369B3AF3E0}"/>
+                <a16:creationId xmlns:a16="http://schemas.microsoft.com/office/drawing/2014/main" id="{4D6BF140-4AD6-47B6-B128-F3369B3AF3E0}"/>
               </a:ext>
             </a:extLst>
           </p:cNvPr>
@@ -31109,8 +31155,8 @@
           </a:p>
         </p:txBody>
       </p:sp>
-      <mc:AlternateContent xmlns:mc="http://schemas.openxmlformats.org/markup-compatibility/2006" xmlns:a14="http://schemas.microsoft.com/office/drawing/2010/main">
-        <mc:Choice Requires="a14">
+      <mc:AlternateContent xmlns:mc="http://schemas.openxmlformats.org/markup-compatibility/2006">
+        <mc:Choice xmlns:a14="http://schemas.microsoft.com/office/drawing/2010/main" Requires="a14">
           <p:sp>
             <p:nvSpPr>
               <p:cNvPr id="3" name="Объект 2"/>
@@ -31260,8 +31306,12 @@
                   <a:buNone/>
                 </a:pPr>
                 <a:r>
+                  <a:rPr lang="ru-RU" b="1" dirty="0"/>
+                  <a:t>Предикатом</a:t>
+                </a:r>
+                <a:r>
                   <a:rPr lang="ru-RU" dirty="0"/>
-                  <a:t>Предикатом на множестве </a:t>
+                  <a:t> на множестве </a:t>
                 </a:r>
                 <a14:m>
                   <m:oMath xmlns:m="http://schemas.openxmlformats.org/officeDocument/2006/math">
@@ -31455,7 +31505,7 @@
             </p:txBody>
           </p:sp>
         </mc:Choice>
-        <mc:Fallback xmlns="">
+        <mc:Fallback>
           <p:sp>
             <p:nvSpPr>
               <p:cNvPr id="3" name="Объект 2"/>
@@ -31467,7 +31517,7 @@
               </p:nvPr>
             </p:nvSpPr>
             <p:spPr>
-              <a:blipFill rotWithShape="0">
+              <a:blipFill>
                 <a:blip r:embed="rId2"/>
                 <a:stretch>
                   <a:fillRect l="-928" t="-2661" r="-348"/>
@@ -32972,7 +33022,7 @@
           <p:cNvPr id="6" name="Прямоугольник: скругленные углы 5">
             <a:extLst>
               <a:ext uri="{FF2B5EF4-FFF2-40B4-BE49-F238E27FC236}">
-                <a16:creationId xmlns:a16="http://schemas.microsoft.com/office/drawing/2014/main" xmlns="" id="{4F24DD81-915F-4BD5-9242-0E5C80C39CD4}"/>
+                <a16:creationId xmlns:a16="http://schemas.microsoft.com/office/drawing/2014/main" id="{4F24DD81-915F-4BD5-9242-0E5C80C39CD4}"/>
               </a:ext>
             </a:extLst>
           </p:cNvPr>
@@ -33019,7 +33069,7 @@
               <p:cNvPr id="7" name="TextBox 6">
                 <a:extLst>
                   <a:ext uri="{FF2B5EF4-FFF2-40B4-BE49-F238E27FC236}">
-                    <a16:creationId xmlns:a16="http://schemas.microsoft.com/office/drawing/2014/main" xmlns="" id="{964C0123-D43D-4998-BA21-5ABD6765985B}"/>
+                    <a16:creationId xmlns:a16="http://schemas.microsoft.com/office/drawing/2014/main" id="{964C0123-D43D-4998-BA21-5ABD6765985B}"/>
                   </a:ext>
                 </a:extLst>
               </p:cNvPr>
@@ -33122,7 +33172,7 @@
               <p:cNvPr id="8" name="Прямоугольник: скругленные углы 7">
                 <a:extLst>
                   <a:ext uri="{FF2B5EF4-FFF2-40B4-BE49-F238E27FC236}">
-                    <a16:creationId xmlns:a16="http://schemas.microsoft.com/office/drawing/2014/main" xmlns="" id="{B054E4A5-3176-4FC9-BAD5-BC4C19C28750}"/>
+                    <a16:creationId xmlns:a16="http://schemas.microsoft.com/office/drawing/2014/main" id="{B054E4A5-3176-4FC9-BAD5-BC4C19C28750}"/>
                   </a:ext>
                 </a:extLst>
               </p:cNvPr>
@@ -33237,7 +33287,7 @@
               <p:cNvPr id="9" name="TextBox 8">
                 <a:extLst>
                   <a:ext uri="{FF2B5EF4-FFF2-40B4-BE49-F238E27FC236}">
-                    <a16:creationId xmlns:a16="http://schemas.microsoft.com/office/drawing/2014/main" xmlns="" id="{49266946-C772-4D05-91EC-B627F8595C49}"/>
+                    <a16:creationId xmlns:a16="http://schemas.microsoft.com/office/drawing/2014/main" id="{49266946-C772-4D05-91EC-B627F8595C49}"/>
                   </a:ext>
                 </a:extLst>
               </p:cNvPr>
@@ -33339,7 +33389,7 @@
               <p:cNvPr id="10" name="TextBox 9">
                 <a:extLst>
                   <a:ext uri="{FF2B5EF4-FFF2-40B4-BE49-F238E27FC236}">
-                    <a16:creationId xmlns:a16="http://schemas.microsoft.com/office/drawing/2014/main" xmlns="" id="{AF4F33E2-2FC3-4A7C-AF41-BC587DC23561}"/>
+                    <a16:creationId xmlns:a16="http://schemas.microsoft.com/office/drawing/2014/main" id="{AF4F33E2-2FC3-4A7C-AF41-BC587DC23561}"/>
                   </a:ext>
                 </a:extLst>
               </p:cNvPr>
@@ -35333,7 +35383,7 @@
           <p:cNvPr id="8" name="Прямоугольник: скругленные углы 7">
             <a:extLst>
               <a:ext uri="{FF2B5EF4-FFF2-40B4-BE49-F238E27FC236}">
-                <a16:creationId xmlns:a16="http://schemas.microsoft.com/office/drawing/2014/main" xmlns="" id="{D8DF29BC-5D6B-4F0C-A252-AC3E127EEB58}"/>
+                <a16:creationId xmlns:a16="http://schemas.microsoft.com/office/drawing/2014/main" id="{D8DF29BC-5D6B-4F0C-A252-AC3E127EEB58}"/>
               </a:ext>
             </a:extLst>
           </p:cNvPr>
@@ -35380,7 +35430,7 @@
               <p:cNvPr id="9" name="TextBox 8">
                 <a:extLst>
                   <a:ext uri="{FF2B5EF4-FFF2-40B4-BE49-F238E27FC236}">
-                    <a16:creationId xmlns:a16="http://schemas.microsoft.com/office/drawing/2014/main" xmlns="" id="{26F34E3F-F76A-48D5-B050-81AE562F67D7}"/>
+                    <a16:creationId xmlns:a16="http://schemas.microsoft.com/office/drawing/2014/main" id="{26F34E3F-F76A-48D5-B050-81AE562F67D7}"/>
                   </a:ext>
                 </a:extLst>
               </p:cNvPr>
@@ -35481,7 +35531,7 @@
           <p:cNvPr id="10" name="Прямоугольник: скругленные углы 9">
             <a:extLst>
               <a:ext uri="{FF2B5EF4-FFF2-40B4-BE49-F238E27FC236}">
-                <a16:creationId xmlns:a16="http://schemas.microsoft.com/office/drawing/2014/main" xmlns="" id="{628C3EE1-62B6-46FB-A434-307ADC8C47AE}"/>
+                <a16:creationId xmlns:a16="http://schemas.microsoft.com/office/drawing/2014/main" id="{628C3EE1-62B6-46FB-A434-307ADC8C47AE}"/>
               </a:ext>
             </a:extLst>
           </p:cNvPr>
@@ -35529,7 +35579,7 @@
               <p:cNvPr id="11" name="TextBox 10">
                 <a:extLst>
                   <a:ext uri="{FF2B5EF4-FFF2-40B4-BE49-F238E27FC236}">
-                    <a16:creationId xmlns:a16="http://schemas.microsoft.com/office/drawing/2014/main" xmlns="" id="{BBFA85AD-D894-4819-ADF8-1706078CFB0D}"/>
+                    <a16:creationId xmlns:a16="http://schemas.microsoft.com/office/drawing/2014/main" id="{BBFA85AD-D894-4819-ADF8-1706078CFB0D}"/>
                   </a:ext>
                 </a:extLst>
               </p:cNvPr>
@@ -35631,7 +35681,7 @@
               <p:cNvPr id="12" name="TextBox 11">
                 <a:extLst>
                   <a:ext uri="{FF2B5EF4-FFF2-40B4-BE49-F238E27FC236}">
-                    <a16:creationId xmlns:a16="http://schemas.microsoft.com/office/drawing/2014/main" xmlns="" id="{6B4B26E6-D864-4288-AED4-535C44E3072B}"/>
+                    <a16:creationId xmlns:a16="http://schemas.microsoft.com/office/drawing/2014/main" id="{6B4B26E6-D864-4288-AED4-535C44E3072B}"/>
                   </a:ext>
                 </a:extLst>
               </p:cNvPr>
@@ -35731,7 +35781,7 @@
           <p:cNvPr id="6" name="Овал 5">
             <a:extLst>
               <a:ext uri="{FF2B5EF4-FFF2-40B4-BE49-F238E27FC236}">
-                <a16:creationId xmlns:a16="http://schemas.microsoft.com/office/drawing/2014/main" xmlns="" id="{A433FB22-2752-4EBC-BBE6-5A3FFD871B1A}"/>
+                <a16:creationId xmlns:a16="http://schemas.microsoft.com/office/drawing/2014/main" id="{A433FB22-2752-4EBC-BBE6-5A3FFD871B1A}"/>
               </a:ext>
             </a:extLst>
           </p:cNvPr>
@@ -35777,7 +35827,7 @@
           <p:cNvPr id="13" name="Овал 12">
             <a:extLst>
               <a:ext uri="{FF2B5EF4-FFF2-40B4-BE49-F238E27FC236}">
-                <a16:creationId xmlns:a16="http://schemas.microsoft.com/office/drawing/2014/main" xmlns="" id="{5598AD4E-8E11-4C11-858C-55F20BB1DF4D}"/>
+                <a16:creationId xmlns:a16="http://schemas.microsoft.com/office/drawing/2014/main" id="{5598AD4E-8E11-4C11-858C-55F20BB1DF4D}"/>
               </a:ext>
             </a:extLst>
           </p:cNvPr>
@@ -35825,7 +35875,7 @@
               <p:cNvPr id="14" name="TextBox 13">
                 <a:extLst>
                   <a:ext uri="{FF2B5EF4-FFF2-40B4-BE49-F238E27FC236}">
-                    <a16:creationId xmlns:a16="http://schemas.microsoft.com/office/drawing/2014/main" xmlns="" id="{ED95C6A8-97D8-4529-8052-975470077F67}"/>
+                    <a16:creationId xmlns:a16="http://schemas.microsoft.com/office/drawing/2014/main" id="{ED95C6A8-97D8-4529-8052-975470077F67}"/>
                   </a:ext>
                 </a:extLst>
               </p:cNvPr>
@@ -35940,7 +35990,7 @@
               <p:cNvPr id="15" name="TextBox 14">
                 <a:extLst>
                   <a:ext uri="{FF2B5EF4-FFF2-40B4-BE49-F238E27FC236}">
-                    <a16:creationId xmlns:a16="http://schemas.microsoft.com/office/drawing/2014/main" xmlns="" id="{2539DFDB-32F3-4741-A205-C31D1E964F08}"/>
+                    <a16:creationId xmlns:a16="http://schemas.microsoft.com/office/drawing/2014/main" id="{2539DFDB-32F3-4741-A205-C31D1E964F08}"/>
                   </a:ext>
                 </a:extLst>
               </p:cNvPr>
@@ -36040,7 +36090,7 @@
           <p:cNvPr id="17" name="Соединитель: изогнутый 16">
             <a:extLst>
               <a:ext uri="{FF2B5EF4-FFF2-40B4-BE49-F238E27FC236}">
-                <a16:creationId xmlns:a16="http://schemas.microsoft.com/office/drawing/2014/main" xmlns="" id="{23E43CEB-9683-4FE8-8719-965DA636E544}"/>
+                <a16:creationId xmlns:a16="http://schemas.microsoft.com/office/drawing/2014/main" id="{23E43CEB-9683-4FE8-8719-965DA636E544}"/>
               </a:ext>
             </a:extLst>
           </p:cNvPr>
@@ -36082,7 +36132,7 @@
           <p:cNvPr id="18" name="Соединитель: изогнутый 17">
             <a:extLst>
               <a:ext uri="{FF2B5EF4-FFF2-40B4-BE49-F238E27FC236}">
-                <a16:creationId xmlns:a16="http://schemas.microsoft.com/office/drawing/2014/main" xmlns="" id="{BBA55590-A29F-4B15-BD1A-03C80A16E1BA}"/>
+                <a16:creationId xmlns:a16="http://schemas.microsoft.com/office/drawing/2014/main" id="{BBA55590-A29F-4B15-BD1A-03C80A16E1BA}"/>
               </a:ext>
             </a:extLst>
           </p:cNvPr>
@@ -36129,7 +36179,7 @@
               <p:cNvPr id="19" name="TextBox 18">
                 <a:extLst>
                   <a:ext uri="{FF2B5EF4-FFF2-40B4-BE49-F238E27FC236}">
-                    <a16:creationId xmlns:a16="http://schemas.microsoft.com/office/drawing/2014/main" xmlns="" id="{7E5337A5-0B30-4F11-A44C-25EBF753FBEC}"/>
+                    <a16:creationId xmlns:a16="http://schemas.microsoft.com/office/drawing/2014/main" id="{7E5337A5-0B30-4F11-A44C-25EBF753FBEC}"/>
                   </a:ext>
                 </a:extLst>
               </p:cNvPr>
@@ -37885,8 +37935,8 @@
           </a:p>
         </p:txBody>
       </p:sp>
-      <mc:AlternateContent xmlns:mc="http://schemas.openxmlformats.org/markup-compatibility/2006" xmlns:a14="http://schemas.microsoft.com/office/drawing/2010/main">
-        <mc:Choice Requires="a14">
+      <mc:AlternateContent xmlns:mc="http://schemas.openxmlformats.org/markup-compatibility/2006">
+        <mc:Choice xmlns:a14="http://schemas.microsoft.com/office/drawing/2010/main" Requires="a14">
           <p:sp>
             <p:nvSpPr>
               <p:cNvPr id="3" name="Объект 2"/>
@@ -38119,7 +38169,17 @@
                 </a14:m>
                 <a:r>
                   <a:rPr lang="en-US" dirty="0"/>
-                  <a:t> - </a:t>
+                  <a:t> </a:t>
+                </a:r>
+                <a:r>
+                  <a:rPr lang="ru-RU" dirty="0">
+                    <a:latin typeface="Cambria Math" panose="02040503050406030204" pitchFamily="18" charset="0"/>
+                  </a:rPr>
+                  <a:t>–</a:t>
+                </a:r>
+                <a:r>
+                  <a:rPr lang="en-US" dirty="0"/>
+                  <a:t> </a:t>
                 </a:r>
                 <a:r>
                   <a:rPr lang="ru-RU" dirty="0"/>
@@ -38717,7 +38777,17 @@
                 </a14:m>
                 <a:r>
                   <a:rPr lang="en-US" dirty="0"/>
-                  <a:t> - </a:t>
+                  <a:t> </a:t>
+                </a:r>
+                <a:r>
+                  <a:rPr lang="ru-RU" dirty="0">
+                    <a:latin typeface="Cambria Math" panose="02040503050406030204" pitchFamily="18" charset="0"/>
+                  </a:rPr>
+                  <a:t>–</a:t>
+                </a:r>
+                <a:r>
+                  <a:rPr lang="en-US" dirty="0"/>
+                  <a:t> </a:t>
                 </a:r>
                 <a:r>
                   <a:rPr lang="ru-RU" dirty="0"/>
@@ -38928,7 +38998,7 @@
             </p:txBody>
           </p:sp>
         </mc:Choice>
-        <mc:Fallback xmlns="">
+        <mc:Fallback>
           <p:sp>
             <p:nvSpPr>
               <p:cNvPr id="3" name="Объект 2"/>
@@ -38947,7 +39017,7 @@
               <a:blipFill>
                 <a:blip r:embed="rId2"/>
                 <a:stretch>
-                  <a:fillRect l="-1043" t="-2241" r="-522" b="-22269"/>
+                  <a:fillRect l="-1043" t="-2241" b="-22269"/>
                 </a:stretch>
               </a:blipFill>
             </p:spPr>
@@ -39802,7 +39872,7 @@
           <p:cNvPr id="5" name="TextBox 4">
             <a:extLst>
               <a:ext uri="{FF2B5EF4-FFF2-40B4-BE49-F238E27FC236}">
-                <a16:creationId xmlns:a16="http://schemas.microsoft.com/office/drawing/2014/main" xmlns="" id="{A5DBC421-A8F1-4B80-A453-62B59842F0B1}"/>
+                <a16:creationId xmlns:a16="http://schemas.microsoft.com/office/drawing/2014/main" id="{A5DBC421-A8F1-4B80-A453-62B59842F0B1}"/>
               </a:ext>
             </a:extLst>
           </p:cNvPr>
@@ -40111,13 +40181,7 @@
                         <a:rPr lang="en-US" b="0" i="1" smtClean="0">
                           <a:latin typeface="Cambria Math" panose="02040503050406030204" pitchFamily="18" charset="0"/>
                         </a:rPr>
-                        <m:t>(бросок "честной" монетки</m:t>
-                      </m:r>
-                      <m:r>
-                        <a:rPr lang="ru-RU" b="0" i="1" smtClean="0">
-                          <a:latin typeface="Cambria Math" panose="02040503050406030204" pitchFamily="18" charset="0"/>
-                        </a:rPr>
-                        <m:t>)≥</m:t>
+                        <m:t>(бросок "честной" монетки)≥</m:t>
                       </m:r>
                       <m:r>
                         <a:rPr lang="en-US" b="0" i="1" smtClean="0">
@@ -40129,13 +40193,13 @@
                         <a:rPr lang="en-US" b="0" i="1" smtClean="0">
                           <a:latin typeface="Cambria Math" panose="02040503050406030204" pitchFamily="18" charset="0"/>
                         </a:rPr>
-                        <m:t>(бросок монетки, одна из </m:t>
+                        <m:t>(бросок монетки, одна из стор</m:t>
                       </m:r>
                       <m:r>
                         <a:rPr lang="ru-RU" b="0" i="1" smtClean="0">
                           <a:latin typeface="Cambria Math" panose="02040503050406030204" pitchFamily="18" charset="0"/>
                         </a:rPr>
-                        <m:t>сторон которой тяжелее)</m:t>
+                        <m:t>он которой тяжелее)</m:t>
                       </m:r>
                     </m:oMath>
                   </m:oMathPara>
@@ -40211,7 +40275,7 @@
           <p:cNvPr id="5" name="TextBox 4">
             <a:extLst>
               <a:ext uri="{FF2B5EF4-FFF2-40B4-BE49-F238E27FC236}">
-                <a16:creationId xmlns:a16="http://schemas.microsoft.com/office/drawing/2014/main" xmlns="" id="{A5DBC421-A8F1-4B80-A453-62B59842F0B1}"/>
+                <a16:creationId xmlns:a16="http://schemas.microsoft.com/office/drawing/2014/main" id="{A5DBC421-A8F1-4B80-A453-62B59842F0B1}"/>
               </a:ext>
             </a:extLst>
           </p:cNvPr>

--- a/Lectures/Lecture1.pptx
+++ b/Lectures/Lecture1.pptx
@@ -365,7 +365,7 @@
           <a:p>
             <a:fld id="{CBA08D16-15DC-4E25-BDC3-F25146157B16}" type="datetimeFigureOut">
               <a:rPr lang="ru-RU" smtClean="0"/>
-              <a:t>02.09.2026</a:t>
+              <a:t>03.09.2026</a:t>
             </a:fld>
             <a:endParaRPr lang="ru-RU"/>
           </a:p>
@@ -941,7 +941,7 @@
           <a:p>
             <a:fld id="{FCEC8293-DB51-454A-BE81-EC8FCB31EBA2}" type="datetime1">
               <a:rPr lang="ru-RU" smtClean="0"/>
-              <a:t>02.09.2026</a:t>
+              <a:t>03.09.2026</a:t>
             </a:fld>
             <a:endParaRPr lang="ru-RU"/>
           </a:p>
@@ -1112,7 +1112,7 @@
           <a:p>
             <a:fld id="{241C87B1-1C35-4DBD-BC18-2BC72E776603}" type="datetime1">
               <a:rPr lang="ru-RU" smtClean="0"/>
-              <a:t>02.09.2026</a:t>
+              <a:t>03.09.2026</a:t>
             </a:fld>
             <a:endParaRPr lang="ru-RU"/>
           </a:p>
@@ -1293,7 +1293,7 @@
           <a:p>
             <a:fld id="{3134C275-26C0-42CD-9111-9ADE65922AF9}" type="datetime1">
               <a:rPr lang="ru-RU" smtClean="0"/>
-              <a:t>02.09.2026</a:t>
+              <a:t>03.09.2026</a:t>
             </a:fld>
             <a:endParaRPr lang="ru-RU"/>
           </a:p>
@@ -1464,7 +1464,7 @@
           <a:p>
             <a:fld id="{C1A9A50B-C350-45F5-8AAB-ADB9E670AF2E}" type="datetime1">
               <a:rPr lang="ru-RU" smtClean="0"/>
-              <a:t>02.09.2026</a:t>
+              <a:t>03.09.2026</a:t>
             </a:fld>
             <a:endParaRPr lang="ru-RU"/>
           </a:p>
@@ -1712,7 +1712,7 @@
           <a:p>
             <a:fld id="{089688C9-348F-42F9-B6C0-5990DDE0C5B2}" type="datetime1">
               <a:rPr lang="ru-RU" smtClean="0"/>
-              <a:t>02.09.2026</a:t>
+              <a:t>03.09.2026</a:t>
             </a:fld>
             <a:endParaRPr lang="ru-RU"/>
           </a:p>
@@ -1944,7 +1944,7 @@
           <a:p>
             <a:fld id="{684AFD8F-6DD9-4AD3-A505-FDC3F5C5F3F6}" type="datetime1">
               <a:rPr lang="ru-RU" smtClean="0"/>
-              <a:t>02.09.2026</a:t>
+              <a:t>03.09.2026</a:t>
             </a:fld>
             <a:endParaRPr lang="ru-RU"/>
           </a:p>
@@ -2311,7 +2311,7 @@
           <a:p>
             <a:fld id="{63551EFE-4D02-45EB-A747-8B6F047B5AA0}" type="datetime1">
               <a:rPr lang="ru-RU" smtClean="0"/>
-              <a:t>02.09.2026</a:t>
+              <a:t>03.09.2026</a:t>
             </a:fld>
             <a:endParaRPr lang="ru-RU"/>
           </a:p>
@@ -2431,7 +2431,7 @@
           <a:p>
             <a:fld id="{813A9F34-E5CD-4B8F-AA9E-889C84372B20}" type="datetime1">
               <a:rPr lang="ru-RU" smtClean="0"/>
-              <a:t>02.09.2026</a:t>
+              <a:t>03.09.2026</a:t>
             </a:fld>
             <a:endParaRPr lang="ru-RU"/>
           </a:p>
@@ -2529,7 +2529,7 @@
           <a:p>
             <a:fld id="{51224D22-9B29-44A6-8E82-95FC492DEDC1}" type="datetime1">
               <a:rPr lang="ru-RU" smtClean="0"/>
-              <a:t>02.09.2026</a:t>
+              <a:t>03.09.2026</a:t>
             </a:fld>
             <a:endParaRPr lang="ru-RU"/>
           </a:p>
@@ -2807,7 +2807,7 @@
           <a:p>
             <a:fld id="{91D1034F-4441-48A1-BDC0-25EA1022324A}" type="datetime1">
               <a:rPr lang="ru-RU" smtClean="0"/>
-              <a:t>02.09.2026</a:t>
+              <a:t>03.09.2026</a:t>
             </a:fld>
             <a:endParaRPr lang="ru-RU"/>
           </a:p>
@@ -3062,7 +3062,7 @@
           <a:p>
             <a:fld id="{B0FFDE79-B627-473B-AE17-4C65BD2495F7}" type="datetime1">
               <a:rPr lang="ru-RU" smtClean="0"/>
-              <a:t>02.09.2026</a:t>
+              <a:t>03.09.2026</a:t>
             </a:fld>
             <a:endParaRPr lang="ru-RU"/>
           </a:p>
@@ -3276,7 +3276,7 @@
           <a:p>
             <a:fld id="{11CA537A-1B8C-47BA-9BA6-7CE3FAFDA8BE}" type="datetime1">
               <a:rPr lang="ru-RU" smtClean="0"/>
-              <a:t>02.09.2026</a:t>
+              <a:t>03.09.2026</a:t>
             </a:fld>
             <a:endParaRPr lang="ru-RU"/>
           </a:p>
@@ -11073,8 +11073,8 @@
           </a:p>
         </p:txBody>
       </p:sp>
-      <mc:AlternateContent xmlns:mc="http://schemas.openxmlformats.org/markup-compatibility/2006">
-        <mc:Choice xmlns:a14="http://schemas.microsoft.com/office/drawing/2010/main" Requires="a14">
+      <mc:AlternateContent xmlns:mc="http://schemas.openxmlformats.org/markup-compatibility/2006" xmlns:a14="http://schemas.microsoft.com/office/drawing/2010/main">
+        <mc:Choice Requires="a14">
           <p:sp>
             <p:nvSpPr>
               <p:cNvPr id="3" name="Объект 2"/>
@@ -11485,7 +11485,7 @@
             </p:txBody>
           </p:sp>
         </mc:Choice>
-        <mc:Fallback>
+        <mc:Fallback xmlns="">
           <p:sp>
             <p:nvSpPr>
               <p:cNvPr id="3" name="Объект 2"/>
@@ -18332,8 +18332,8 @@
           </a:p>
         </p:txBody>
       </p:sp>
-      <mc:AlternateContent xmlns:mc="http://schemas.openxmlformats.org/markup-compatibility/2006">
-        <mc:Choice xmlns:a14="http://schemas.microsoft.com/office/drawing/2010/main" Requires="a14">
+      <mc:AlternateContent xmlns:mc="http://schemas.openxmlformats.org/markup-compatibility/2006" xmlns:a14="http://schemas.microsoft.com/office/drawing/2010/main">
+        <mc:Choice Requires="a14">
           <p:sp>
             <p:nvSpPr>
               <p:cNvPr id="3" name="Объект 2"/>
@@ -19376,7 +19376,7 @@
             </p:txBody>
           </p:sp>
         </mc:Choice>
-        <mc:Fallback>
+        <mc:Fallback xmlns="">
           <p:sp>
             <p:nvSpPr>
               <p:cNvPr id="3" name="Объект 2"/>
@@ -31155,8 +31155,8 @@
           </a:p>
         </p:txBody>
       </p:sp>
-      <mc:AlternateContent xmlns:mc="http://schemas.openxmlformats.org/markup-compatibility/2006">
-        <mc:Choice xmlns:a14="http://schemas.microsoft.com/office/drawing/2010/main" Requires="a14">
+      <mc:AlternateContent xmlns:mc="http://schemas.openxmlformats.org/markup-compatibility/2006" xmlns:a14="http://schemas.microsoft.com/office/drawing/2010/main">
+        <mc:Choice Requires="a14">
           <p:sp>
             <p:nvSpPr>
               <p:cNvPr id="3" name="Объект 2"/>
@@ -31505,7 +31505,7 @@
             </p:txBody>
           </p:sp>
         </mc:Choice>
-        <mc:Fallback>
+        <mc:Fallback xmlns="">
           <p:sp>
             <p:nvSpPr>
               <p:cNvPr id="3" name="Объект 2"/>
@@ -37935,8 +37935,8 @@
           </a:p>
         </p:txBody>
       </p:sp>
-      <mc:AlternateContent xmlns:mc="http://schemas.openxmlformats.org/markup-compatibility/2006">
-        <mc:Choice xmlns:a14="http://schemas.microsoft.com/office/drawing/2010/main" Requires="a14">
+      <mc:AlternateContent xmlns:mc="http://schemas.openxmlformats.org/markup-compatibility/2006" xmlns:a14="http://schemas.microsoft.com/office/drawing/2010/main">
+        <mc:Choice Requires="a14">
           <p:sp>
             <p:nvSpPr>
               <p:cNvPr id="3" name="Объект 2"/>
@@ -38998,7 +38998,7 @@
             </p:txBody>
           </p:sp>
         </mc:Choice>
-        <mc:Fallback>
+        <mc:Fallback xmlns="">
           <p:sp>
             <p:nvSpPr>
               <p:cNvPr id="3" name="Объект 2"/>
@@ -40193,13 +40193,7 @@
                         <a:rPr lang="en-US" b="0" i="1" smtClean="0">
                           <a:latin typeface="Cambria Math" panose="02040503050406030204" pitchFamily="18" charset="0"/>
                         </a:rPr>
-                        <m:t>(бросок монетки, одна из стор</m:t>
-                      </m:r>
-                      <m:r>
-                        <a:rPr lang="ru-RU" b="0" i="1" smtClean="0">
-                          <a:latin typeface="Cambria Math" panose="02040503050406030204" pitchFamily="18" charset="0"/>
-                        </a:rPr>
-                        <m:t>он которой тяжелее)</m:t>
+                        <m:t>(бросок монетки, одна из сторон которой тяжелее)</m:t>
                       </m:r>
                     </m:oMath>
                   </m:oMathPara>
@@ -40398,7 +40392,15 @@
           <a:p>
             <a:r>
               <a:rPr lang="ru-RU" dirty="0"/>
-              <a:t>Эквивалентные определения идеального шифра</a:t>
+              <a:t>Эквивалентные определения </a:t>
+            </a:r>
+            <a:r>
+              <a:rPr lang="ru-RU"/>
+              <a:t>абсолютно стойкого </a:t>
+            </a:r>
+            <a:r>
+              <a:rPr lang="ru-RU" dirty="0"/>
+              <a:t>шифра</a:t>
             </a:r>
           </a:p>
         </p:txBody>
